--- a/classes/parte-11-devsecops-y-seguridad-del-sdlc/236-secure-sdlc-y-filosofia-shift-left/clase-236-presentacion.pptx
+++ b/classes/parte-11-devsecops-y-seguridad-del-sdlc/236-secure-sdlc-y-filosofia-shift-left/clase-236-presentacion.pptx
@@ -17,6 +17,10 @@
     <p:sldId id="265" r:id="rId16"/>
     <p:sldId id="266" r:id="rId17"/>
     <p:sldId id="267" r:id="rId18"/>
+    <p:sldId id="268" r:id="rId19"/>
+    <p:sldId id="269" r:id="rId20"/>
+    <p:sldId id="270" r:id="rId21"/>
+    <p:sldId id="271" r:id="rId22"/>
   </p:sldIdLst>
   <p:sldSz cx="9144000" cy="6858000" type="screen4x3"/>
   <p:notesSz cx="6858000" cy="9144000"/>
@@ -3198,7 +3202,7 @@
                   <a:srgbClr val="0B3D2E"/>
                 </a:solidFill>
               </a:rPr>
-              <a:t>⚠️ Errores comunes</a:t>
+              <a:t>🧪 Laboratorio guiado</a:t>
             </a:r>
           </a:p>
         </p:txBody>
@@ -3236,67 +3240,97 @@
                   <a:srgbClr val="22282E"/>
                 </a:solidFill>
               </a:rPr>
-              <a:t>•  "Shift-left = comprar herramientas SAST" — Confundir herramienta con proceso. Empieza por el proceso y los gates, la herramienta viene después.</a:t>
-            </a:r>
-          </a:p>
-          <a:p>
-            <a:pPr>
-              <a:spcAft>
-                <a:spcPts val="600"/>
-              </a:spcAft>
-            </a:pPr>
-            <a:r>
-              <a:rPr sz="1500">
-                <a:solidFill>
-                  <a:srgbClr val="22282E"/>
-                </a:solidFill>
-              </a:rPr>
-              <a:t>•  El pipeline se llena de falsos positivos y se ignora — No se afinó ni se definió qué rompe el build. Calibra severidades y empieza en modo "warning".</a:t>
-            </a:r>
-          </a:p>
-          <a:p>
-            <a:pPr>
-              <a:spcAft>
-                <a:spcPts val="600"/>
-              </a:spcAft>
-            </a:pPr>
-            <a:r>
-              <a:rPr sz="1500">
-                <a:solidFill>
-                  <a:srgbClr val="22282E"/>
-                </a:solidFill>
-              </a:rPr>
-              <a:t>•  AppSec sigue siendo cuello de botella — No se delegó ownership al equipo de desarrollo. Forma champions (clase 248) y automatiza.</a:t>
-            </a:r>
-          </a:p>
-          <a:p>
-            <a:pPr>
-              <a:spcAft>
-                <a:spcPts val="600"/>
-              </a:spcAft>
-            </a:pPr>
-            <a:r>
-              <a:rPr sz="1500">
-                <a:solidFill>
-                  <a:srgbClr val="22282E"/>
-                </a:solidFill>
-              </a:rPr>
-              <a:t>•  Se mide "número de vulnerabilidades" y sube — Métrica sin contexto de riesgo. Mide tiempo de remediación y densidad por exposición.</a:t>
-            </a:r>
-          </a:p>
-          <a:p>
-            <a:pPr>
-              <a:spcAft>
-                <a:spcPts val="600"/>
-              </a:spcAft>
-            </a:pPr>
-            <a:r>
-              <a:rPr sz="1500">
-                <a:solidFill>
-                  <a:srgbClr val="22282E"/>
-                </a:solidFill>
-              </a:rPr>
-              <a:t>•  Todo el foco en shift-left, nada en producción — Falta observabilidad. Complementa con shift-right (logging, detección en runtime).</a:t>
+              <a:t>•  Ejercicio aplicado de diseño y evaluación (no ofensivo):</a:t>
+            </a:r>
+          </a:p>
+          <a:p>
+            <a:pPr>
+              <a:spcAft>
+                <a:spcPts val="600"/>
+              </a:spcAft>
+            </a:pPr>
+            <a:r>
+              <a:rPr sz="1500">
+                <a:solidFill>
+                  <a:srgbClr val="22282E"/>
+                </a:solidFill>
+              </a:rPr>
+              <a:t>•  Dibuja tu SDLC actual. Lista las fases reales por las que pasa un cambio en tu equipo: idea → requisitos → diseño → codificación → PR/review → build → test → despliegue → operación.</a:t>
+            </a:r>
+          </a:p>
+          <a:p>
+            <a:pPr>
+              <a:spcAft>
+                <a:spcPts val="600"/>
+              </a:spcAft>
+            </a:pPr>
+            <a:r>
+              <a:rPr sz="1500">
+                <a:solidFill>
+                  <a:srgbClr val="22282E"/>
+                </a:solidFill>
+              </a:rPr>
+              <a:t>•  Ubica los controles existentes. Marca en cada fase qué comprobación de seguridad ya existe hoy (aunque sea "ninguna"). Sé honesto.</a:t>
+            </a:r>
+          </a:p>
+          <a:p>
+            <a:pPr>
+              <a:spcAft>
+                <a:spcPts val="600"/>
+              </a:spcAft>
+            </a:pPr>
+            <a:r>
+              <a:rPr sz="1500">
+                <a:solidFill>
+                  <a:srgbClr val="22282E"/>
+                </a:solidFill>
+              </a:rPr>
+              <a:t>•  Identifica los huecos. Para cada fase sin control, anota una práctica candidata de esta parte (p. ej. threat modeling en diseño, SAST en PR, SCA en build).</a:t>
+            </a:r>
+          </a:p>
+          <a:p>
+            <a:pPr>
+              <a:spcAft>
+                <a:spcPts val="600"/>
+              </a:spcAft>
+            </a:pPr>
+            <a:r>
+              <a:rPr sz="1500">
+                <a:solidFill>
+                  <a:srgbClr val="22282E"/>
+                </a:solidFill>
+              </a:rPr>
+              <a:t>•  Descarga el toolbox de OWASP SAMM v2 y completa la auto-evaluación de al menos la práctica "Secure Build" y "Security Testing". Anota tu nivel actual (0–3).</a:t>
+            </a:r>
+          </a:p>
+          <a:p>
+            <a:pPr>
+              <a:spcAft>
+                <a:spcPts val="600"/>
+              </a:spcAft>
+            </a:pPr>
+            <a:r>
+              <a:rPr sz="1500">
+                <a:solidFill>
+                  <a:srgbClr val="22282E"/>
+                </a:solidFill>
+              </a:rPr>
+              <a:t>•  Estima el coste. Toma un defecto de seguridad real corregido en producción y separa horas de diagnóstico, cambio, coordinación, despliegue, recuperación y soporte. Construye después un escenario…</a:t>
+            </a:r>
+          </a:p>
+          <a:p>
+            <a:pPr>
+              <a:spcAft>
+                <a:spcPts val="600"/>
+              </a:spcAft>
+            </a:pPr>
+            <a:r>
+              <a:rPr sz="1500">
+                <a:solidFill>
+                  <a:srgbClr val="22282E"/>
+                </a:solidFill>
+              </a:rPr>
+              <a:t>•  Prioriza 3 gates. Elige los tres controles automatizados de mayor impacto/menor esfuerzo para introducir primero y justifícalos.</a:t>
             </a:r>
           </a:p>
         </p:txBody>
@@ -3347,7 +3381,7 @@
                   <a:srgbClr val="0B3D2E"/>
                 </a:solidFill>
               </a:rPr>
-              <a:t>❓ Preguntas frecuentes</a:t>
+              <a:t>✍️ Ejercicios</a:t>
             </a:r>
           </a:p>
         </p:txBody>
@@ -3385,97 +3419,82 @@
                   <a:srgbClr val="22282E"/>
                 </a:solidFill>
               </a:rPr>
-              <a:t>•  ❓ ¿Shift-left significa que los desarrolladores hacen todo el trabajo de seguridad?</a:t>
-            </a:r>
-          </a:p>
-          <a:p>
-            <a:pPr>
-              <a:spcAft>
-                <a:spcPts val="600"/>
-              </a:spcAft>
-            </a:pPr>
-            <a:r>
-              <a:rPr sz="1500">
-                <a:solidFill>
-                  <a:srgbClr val="22282E"/>
-                </a:solidFill>
-              </a:rPr>
-              <a:t>•  No. Significa que las herramientas y prácticas de seguridad están disponibles para ellos temprano y de forma automatizada, con AppSec como habilitador y guardián de estándares, no como ejecutor único.</a:t>
-            </a:r>
-          </a:p>
-          <a:p>
-            <a:pPr>
-              <a:spcAft>
-                <a:spcPts val="600"/>
-              </a:spcAft>
-            </a:pPr>
-            <a:r>
-              <a:rPr sz="1500">
-                <a:solidFill>
-                  <a:srgbClr val="22282E"/>
-                </a:solidFill>
-              </a:rPr>
-              <a:t>•  ❓ ¿Necesito madurar en SAMM antes de automatizar?</a:t>
-            </a:r>
-          </a:p>
-          <a:p>
-            <a:pPr>
-              <a:spcAft>
-                <a:spcPts val="600"/>
-              </a:spcAft>
-            </a:pPr>
-            <a:r>
-              <a:rPr sz="1500">
-                <a:solidFill>
-                  <a:srgbClr val="22282E"/>
-                </a:solidFill>
-              </a:rPr>
-              <a:t>•  No es secuencial estricto. SAMM te da un diagnóstico; puedes empezar a automatizar los gates de mayor valor mientras subes de nivel en paralelo.</a:t>
-            </a:r>
-          </a:p>
-          <a:p>
-            <a:pPr>
-              <a:spcAft>
-                <a:spcPts val="600"/>
-              </a:spcAft>
-            </a:pPr>
-            <a:r>
-              <a:rPr sz="1500">
-                <a:solidFill>
-                  <a:srgbClr val="22282E"/>
-                </a:solidFill>
-              </a:rPr>
-              <a:t>•  ❓ ¿Secure SDLC aplica a metodologías ágiles?</a:t>
-            </a:r>
-          </a:p>
-          <a:p>
-            <a:pPr>
-              <a:spcAft>
-                <a:spcPts val="600"/>
-              </a:spcAft>
-            </a:pPr>
-            <a:r>
-              <a:rPr sz="1500">
-                <a:solidFill>
-                  <a:srgbClr val="22282E"/>
-                </a:solidFill>
-              </a:rPr>
-              <a:t>•  Sí, y es donde más brilla. En ágil los controles se integran en cada iteración y en el pipeline, no en un "gate de seguridad" al final del proyecto.</a:t>
-            </a:r>
-          </a:p>
-          <a:p>
-            <a:pPr>
-              <a:spcAft>
-                <a:spcPts val="600"/>
-              </a:spcAft>
-            </a:pPr>
-            <a:r>
-              <a:rPr sz="1500">
-                <a:solidFill>
-                  <a:srgbClr val="22282E"/>
-                </a:solidFill>
-              </a:rPr>
-              <a:t>•  ❓ ¿SSDF y SAMM compiten?</a:t>
+              <a:t>•  Enumera las fases del SDLC y asigna a cada una un control de seguridad concreto.</a:t>
+            </a:r>
+          </a:p>
+          <a:p>
+            <a:pPr>
+              <a:spcAft>
+                <a:spcPts val="600"/>
+              </a:spcAft>
+            </a:pPr>
+            <a:r>
+              <a:rPr sz="1500">
+                <a:solidFill>
+                  <a:srgbClr val="22282E"/>
+                </a:solidFill>
+              </a:rPr>
+              <a:t>•  Explica con un ejemplo por qué un fallo de diseño es más caro que un fallo de código.</a:t>
+            </a:r>
+          </a:p>
+          <a:p>
+            <a:pPr>
+              <a:spcAft>
+                <a:spcPts val="600"/>
+              </a:spcAft>
+            </a:pPr>
+            <a:r>
+              <a:rPr sz="1500">
+                <a:solidFill>
+                  <a:srgbClr val="22282E"/>
+                </a:solidFill>
+              </a:rPr>
+              <a:t>•  Diferencia shift-left de shift-right con un caso donde ambos son necesarios.</a:t>
+            </a:r>
+          </a:p>
+          <a:p>
+            <a:pPr>
+              <a:spcAft>
+                <a:spcPts val="600"/>
+              </a:spcAft>
+            </a:pPr>
+            <a:r>
+              <a:rPr sz="1500">
+                <a:solidFill>
+                  <a:srgbClr val="22282E"/>
+                </a:solidFill>
+              </a:rPr>
+              <a:t>•  Compara OWASP SAMM y BSIMM: cuándo usarías cada uno.</a:t>
+            </a:r>
+          </a:p>
+          <a:p>
+            <a:pPr>
+              <a:spcAft>
+                <a:spcPts val="600"/>
+              </a:spcAft>
+            </a:pPr>
+            <a:r>
+              <a:rPr sz="1500">
+                <a:solidFill>
+                  <a:srgbClr val="22282E"/>
+                </a:solidFill>
+              </a:rPr>
+              <a:t>•  Redacta un "definition of done" que incluya al menos tres criterios de seguridad.</a:t>
+            </a:r>
+          </a:p>
+          <a:p>
+            <a:pPr>
+              <a:spcAft>
+                <a:spcPts val="600"/>
+              </a:spcAft>
+            </a:pPr>
+            <a:r>
+              <a:rPr sz="1500">
+                <a:solidFill>
+                  <a:srgbClr val="22282E"/>
+                </a:solidFill>
+              </a:rPr>
+              <a:t>•  Diseña un roadmap de 90 días para llevar una práctica de SAMM de nivel 0 a nivel 1.</a:t>
             </a:r>
           </a:p>
         </p:txBody>
@@ -3526,7 +3545,7 @@
                   <a:srgbClr val="0B3D2E"/>
                 </a:solidFill>
               </a:rPr>
-              <a:t>🔗 Referencias</a:t>
+              <a:t>📝 Reto verificable</a:t>
             </a:r>
           </a:p>
         </p:txBody>
@@ -3564,6 +3583,498 @@
                   <a:srgbClr val="22282E"/>
                 </a:solidFill>
               </a:rPr>
+              <a:t>•  Produce un documento de una página con el mapa del SDLC de un proyecto real (o de ejemplo),</a:t>
+            </a:r>
+          </a:p>
+          <a:p>
+            <a:pPr>
+              <a:spcAft>
+                <a:spcPts val="600"/>
+              </a:spcAft>
+            </a:pPr>
+            <a:r>
+              <a:rPr sz="1500">
+                <a:solidFill>
+                  <a:srgbClr val="22282E"/>
+                </a:solidFill>
+              </a:rPr>
+              <a:t>•  con al menos un control automatizado por fase y una auto-evaluación SAMM de tres prácticas.</a:t>
+            </a:r>
+          </a:p>
+          <a:p>
+            <a:pPr>
+              <a:spcAft>
+                <a:spcPts val="600"/>
+              </a:spcAft>
+            </a:pPr>
+            <a:r>
+              <a:rPr sz="1500">
+                <a:solidFill>
+                  <a:srgbClr val="22282E"/>
+                </a:solidFill>
+              </a:rPr>
+              <a:t>•  Criterio de aceptación: el documento (a) cubre todas las fases desde requisitos hasta</a:t>
+            </a:r>
+          </a:p>
+          <a:p>
+            <a:pPr>
+              <a:spcAft>
+                <a:spcPts val="600"/>
+              </a:spcAft>
+            </a:pPr>
+            <a:r>
+              <a:rPr sz="1500">
+                <a:solidFill>
+                  <a:srgbClr val="22282E"/>
+                </a:solidFill>
+              </a:rPr>
+              <a:t>•  operación, (b) asigna al menos un gate automatizable a cada fase, (c) incluye puntuación</a:t>
+            </a:r>
+          </a:p>
+          <a:p>
+            <a:pPr>
+              <a:spcAft>
+                <a:spcPts val="600"/>
+              </a:spcAft>
+            </a:pPr>
+            <a:r>
+              <a:rPr sz="1500">
+                <a:solidFill>
+                  <a:srgbClr val="22282E"/>
+                </a:solidFill>
+              </a:rPr>
+              <a:t>•  SAMM 0–3 de tres prácticas con justificación, y (d) prioriza 3 mejoras con criterio</a:t>
+            </a:r>
+          </a:p>
+          <a:p>
+            <a:pPr>
+              <a:spcAft>
+                <a:spcPts val="600"/>
+              </a:spcAft>
+            </a:pPr>
+            <a:r>
+              <a:rPr sz="1500">
+                <a:solidFill>
+                  <a:srgbClr val="22282E"/>
+                </a:solidFill>
+              </a:rPr>
+              <a:t>•  impacto/esfuerzo explícito.</a:t>
+            </a:r>
+          </a:p>
+        </p:txBody>
+      </p:sp>
+    </p:spTree>
+  </p:cSld>
+  <p:clrMapOvr>
+    <a:masterClrMapping/>
+  </p:clrMapOvr>
+</p:sld>
+</file>
+
+<file path=ppt/slides/slide13.xml><?xml version="1.0" encoding="utf-8"?>
+<p:sld xmlns:a="http://schemas.openxmlformats.org/drawingml/2006/main" xmlns:p="http://schemas.openxmlformats.org/presentationml/2006/main" xmlns:r="http://schemas.openxmlformats.org/officeDocument/2006/relationships">
+  <p:cSld>
+    <p:spTree>
+      <p:nvGrpSpPr>
+        <p:cNvPr id="1" name=""/>
+        <p:cNvGrpSpPr/>
+        <p:nvPr/>
+      </p:nvGrpSpPr>
+      <p:grpSpPr/>
+      <p:sp>
+        <p:nvSpPr>
+          <p:cNvPr id="2" name="TextBox 1"/>
+          <p:cNvSpPr txBox="1"/>
+          <p:nvPr/>
+        </p:nvSpPr>
+        <p:spPr>
+          <a:xfrm>
+            <a:off x="457200" y="320040"/>
+            <a:ext cx="8229600" cy="822960"/>
+          </a:xfrm>
+          <a:prstGeom prst="rect">
+            <a:avLst/>
+          </a:prstGeom>
+          <a:noFill/>
+        </p:spPr>
+        <p:txBody>
+          <a:bodyPr wrap="square">
+            <a:spAutoFit/>
+          </a:bodyPr>
+          <a:lstStyle/>
+          <a:p>
+            <a:r>
+              <a:rPr sz="2600" b="1">
+                <a:solidFill>
+                  <a:srgbClr val="0B3D2E"/>
+                </a:solidFill>
+              </a:rPr>
+              <a:t>⚠️ Errores comunes</a:t>
+            </a:r>
+          </a:p>
+        </p:txBody>
+      </p:sp>
+      <p:sp>
+        <p:nvSpPr>
+          <p:cNvPr id="3" name="TextBox 2"/>
+          <p:cNvSpPr txBox="1"/>
+          <p:nvPr/>
+        </p:nvSpPr>
+        <p:spPr>
+          <a:xfrm>
+            <a:off x="457200" y="1280160"/>
+            <a:ext cx="8229600" cy="4937760"/>
+          </a:xfrm>
+          <a:prstGeom prst="rect">
+            <a:avLst/>
+          </a:prstGeom>
+          <a:noFill/>
+        </p:spPr>
+        <p:txBody>
+          <a:bodyPr wrap="square">
+            <a:spAutoFit/>
+          </a:bodyPr>
+          <a:lstStyle/>
+          <a:p>
+            <a:pPr>
+              <a:spcAft>
+                <a:spcPts val="600"/>
+              </a:spcAft>
+            </a:pPr>
+            <a:r>
+              <a:rPr sz="1500">
+                <a:solidFill>
+                  <a:srgbClr val="22282E"/>
+                </a:solidFill>
+              </a:rPr>
+              <a:t>•  "Shift-left = comprar herramientas SAST" — Confundir herramienta con proceso. Empieza por el proceso y los gates, la herramienta viene después.</a:t>
+            </a:r>
+          </a:p>
+          <a:p>
+            <a:pPr>
+              <a:spcAft>
+                <a:spcPts val="600"/>
+              </a:spcAft>
+            </a:pPr>
+            <a:r>
+              <a:rPr sz="1500">
+                <a:solidFill>
+                  <a:srgbClr val="22282E"/>
+                </a:solidFill>
+              </a:rPr>
+              <a:t>•  El pipeline se llena de falsos positivos y se ignora — No se afinó ni se definió qué rompe el build. Calibra severidades y empieza en modo "warning".</a:t>
+            </a:r>
+          </a:p>
+          <a:p>
+            <a:pPr>
+              <a:spcAft>
+                <a:spcPts val="600"/>
+              </a:spcAft>
+            </a:pPr>
+            <a:r>
+              <a:rPr sz="1500">
+                <a:solidFill>
+                  <a:srgbClr val="22282E"/>
+                </a:solidFill>
+              </a:rPr>
+              <a:t>•  AppSec sigue siendo cuello de botella — No se delegó ownership al equipo de desarrollo. Forma champions (clase 248) y automatiza.</a:t>
+            </a:r>
+          </a:p>
+          <a:p>
+            <a:pPr>
+              <a:spcAft>
+                <a:spcPts val="600"/>
+              </a:spcAft>
+            </a:pPr>
+            <a:r>
+              <a:rPr sz="1500">
+                <a:solidFill>
+                  <a:srgbClr val="22282E"/>
+                </a:solidFill>
+              </a:rPr>
+              <a:t>•  Se mide "número de vulnerabilidades" y sube — Métrica sin contexto de riesgo. Mide tiempo de remediación y densidad por exposición.</a:t>
+            </a:r>
+          </a:p>
+          <a:p>
+            <a:pPr>
+              <a:spcAft>
+                <a:spcPts val="600"/>
+              </a:spcAft>
+            </a:pPr>
+            <a:r>
+              <a:rPr sz="1500">
+                <a:solidFill>
+                  <a:srgbClr val="22282E"/>
+                </a:solidFill>
+              </a:rPr>
+              <a:t>•  Todo el foco en shift-left, nada en producción — Falta observabilidad. Complementa con shift-right (logging, detección en runtime).</a:t>
+            </a:r>
+          </a:p>
+        </p:txBody>
+      </p:sp>
+    </p:spTree>
+  </p:cSld>
+  <p:clrMapOvr>
+    <a:masterClrMapping/>
+  </p:clrMapOvr>
+</p:sld>
+</file>
+
+<file path=ppt/slides/slide14.xml><?xml version="1.0" encoding="utf-8"?>
+<p:sld xmlns:a="http://schemas.openxmlformats.org/drawingml/2006/main" xmlns:p="http://schemas.openxmlformats.org/presentationml/2006/main" xmlns:r="http://schemas.openxmlformats.org/officeDocument/2006/relationships">
+  <p:cSld>
+    <p:spTree>
+      <p:nvGrpSpPr>
+        <p:cNvPr id="1" name=""/>
+        <p:cNvGrpSpPr/>
+        <p:nvPr/>
+      </p:nvGrpSpPr>
+      <p:grpSpPr/>
+      <p:sp>
+        <p:nvSpPr>
+          <p:cNvPr id="2" name="TextBox 1"/>
+          <p:cNvSpPr txBox="1"/>
+          <p:nvPr/>
+        </p:nvSpPr>
+        <p:spPr>
+          <a:xfrm>
+            <a:off x="457200" y="320040"/>
+            <a:ext cx="8229600" cy="822960"/>
+          </a:xfrm>
+          <a:prstGeom prst="rect">
+            <a:avLst/>
+          </a:prstGeom>
+          <a:noFill/>
+        </p:spPr>
+        <p:txBody>
+          <a:bodyPr wrap="square">
+            <a:spAutoFit/>
+          </a:bodyPr>
+          <a:lstStyle/>
+          <a:p>
+            <a:r>
+              <a:rPr sz="2600" b="1">
+                <a:solidFill>
+                  <a:srgbClr val="0B3D2E"/>
+                </a:solidFill>
+              </a:rPr>
+              <a:t>❓ Preguntas frecuentes</a:t>
+            </a:r>
+          </a:p>
+        </p:txBody>
+      </p:sp>
+      <p:sp>
+        <p:nvSpPr>
+          <p:cNvPr id="3" name="TextBox 2"/>
+          <p:cNvSpPr txBox="1"/>
+          <p:nvPr/>
+        </p:nvSpPr>
+        <p:spPr>
+          <a:xfrm>
+            <a:off x="457200" y="1280160"/>
+            <a:ext cx="8229600" cy="4937760"/>
+          </a:xfrm>
+          <a:prstGeom prst="rect">
+            <a:avLst/>
+          </a:prstGeom>
+          <a:noFill/>
+        </p:spPr>
+        <p:txBody>
+          <a:bodyPr wrap="square">
+            <a:spAutoFit/>
+          </a:bodyPr>
+          <a:lstStyle/>
+          <a:p>
+            <a:pPr>
+              <a:spcAft>
+                <a:spcPts val="600"/>
+              </a:spcAft>
+            </a:pPr>
+            <a:r>
+              <a:rPr sz="1500">
+                <a:solidFill>
+                  <a:srgbClr val="22282E"/>
+                </a:solidFill>
+              </a:rPr>
+              <a:t>•  ❓ ¿Shift-left significa que los desarrolladores hacen todo el trabajo de seguridad?</a:t>
+            </a:r>
+          </a:p>
+          <a:p>
+            <a:pPr>
+              <a:spcAft>
+                <a:spcPts val="600"/>
+              </a:spcAft>
+            </a:pPr>
+            <a:r>
+              <a:rPr sz="1500">
+                <a:solidFill>
+                  <a:srgbClr val="22282E"/>
+                </a:solidFill>
+              </a:rPr>
+              <a:t>•  No. Significa que las herramientas y prácticas de seguridad están disponibles para ellos temprano y de forma automatizada, con AppSec como habilitador y guardián de estándares, no como ejecutor único.</a:t>
+            </a:r>
+          </a:p>
+          <a:p>
+            <a:pPr>
+              <a:spcAft>
+                <a:spcPts val="600"/>
+              </a:spcAft>
+            </a:pPr>
+            <a:r>
+              <a:rPr sz="1500">
+                <a:solidFill>
+                  <a:srgbClr val="22282E"/>
+                </a:solidFill>
+              </a:rPr>
+              <a:t>•  ❓ ¿Necesito madurar en SAMM antes de automatizar?</a:t>
+            </a:r>
+          </a:p>
+          <a:p>
+            <a:pPr>
+              <a:spcAft>
+                <a:spcPts val="600"/>
+              </a:spcAft>
+            </a:pPr>
+            <a:r>
+              <a:rPr sz="1500">
+                <a:solidFill>
+                  <a:srgbClr val="22282E"/>
+                </a:solidFill>
+              </a:rPr>
+              <a:t>•  No es secuencial estricto. SAMM te da un diagnóstico; puedes empezar a automatizar los gates de mayor valor mientras subes de nivel en paralelo.</a:t>
+            </a:r>
+          </a:p>
+          <a:p>
+            <a:pPr>
+              <a:spcAft>
+                <a:spcPts val="600"/>
+              </a:spcAft>
+            </a:pPr>
+            <a:r>
+              <a:rPr sz="1500">
+                <a:solidFill>
+                  <a:srgbClr val="22282E"/>
+                </a:solidFill>
+              </a:rPr>
+              <a:t>•  ❓ ¿Secure SDLC aplica a metodologías ágiles?</a:t>
+            </a:r>
+          </a:p>
+          <a:p>
+            <a:pPr>
+              <a:spcAft>
+                <a:spcPts val="600"/>
+              </a:spcAft>
+            </a:pPr>
+            <a:r>
+              <a:rPr sz="1500">
+                <a:solidFill>
+                  <a:srgbClr val="22282E"/>
+                </a:solidFill>
+              </a:rPr>
+              <a:t>•  Sí, y es donde más brilla. En ágil los controles se integran en cada iteración y en el pipeline, no en un "gate de seguridad" al final del proyecto.</a:t>
+            </a:r>
+          </a:p>
+          <a:p>
+            <a:pPr>
+              <a:spcAft>
+                <a:spcPts val="600"/>
+              </a:spcAft>
+            </a:pPr>
+            <a:r>
+              <a:rPr sz="1500">
+                <a:solidFill>
+                  <a:srgbClr val="22282E"/>
+                </a:solidFill>
+              </a:rPr>
+              <a:t>•  ❓ ¿SSDF y SAMM compiten?</a:t>
+            </a:r>
+          </a:p>
+        </p:txBody>
+      </p:sp>
+    </p:spTree>
+  </p:cSld>
+  <p:clrMapOvr>
+    <a:masterClrMapping/>
+  </p:clrMapOvr>
+</p:sld>
+</file>
+
+<file path=ppt/slides/slide15.xml><?xml version="1.0" encoding="utf-8"?>
+<p:sld xmlns:a="http://schemas.openxmlformats.org/drawingml/2006/main" xmlns:p="http://schemas.openxmlformats.org/presentationml/2006/main" xmlns:r="http://schemas.openxmlformats.org/officeDocument/2006/relationships">
+  <p:cSld>
+    <p:spTree>
+      <p:nvGrpSpPr>
+        <p:cNvPr id="1" name=""/>
+        <p:cNvGrpSpPr/>
+        <p:nvPr/>
+      </p:nvGrpSpPr>
+      <p:grpSpPr/>
+      <p:sp>
+        <p:nvSpPr>
+          <p:cNvPr id="2" name="TextBox 1"/>
+          <p:cNvSpPr txBox="1"/>
+          <p:nvPr/>
+        </p:nvSpPr>
+        <p:spPr>
+          <a:xfrm>
+            <a:off x="457200" y="320040"/>
+            <a:ext cx="8229600" cy="822960"/>
+          </a:xfrm>
+          <a:prstGeom prst="rect">
+            <a:avLst/>
+          </a:prstGeom>
+          <a:noFill/>
+        </p:spPr>
+        <p:txBody>
+          <a:bodyPr wrap="square">
+            <a:spAutoFit/>
+          </a:bodyPr>
+          <a:lstStyle/>
+          <a:p>
+            <a:r>
+              <a:rPr sz="2600" b="1">
+                <a:solidFill>
+                  <a:srgbClr val="0B3D2E"/>
+                </a:solidFill>
+              </a:rPr>
+              <a:t>🔗 Referencias</a:t>
+            </a:r>
+          </a:p>
+        </p:txBody>
+      </p:sp>
+      <p:sp>
+        <p:nvSpPr>
+          <p:cNvPr id="3" name="TextBox 2"/>
+          <p:cNvSpPr txBox="1"/>
+          <p:nvPr/>
+        </p:nvSpPr>
+        <p:spPr>
+          <a:xfrm>
+            <a:off x="457200" y="1280160"/>
+            <a:ext cx="8229600" cy="4937760"/>
+          </a:xfrm>
+          <a:prstGeom prst="rect">
+            <a:avLst/>
+          </a:prstGeom>
+          <a:noFill/>
+        </p:spPr>
+        <p:txBody>
+          <a:bodyPr wrap="square">
+            <a:spAutoFit/>
+          </a:bodyPr>
+          <a:lstStyle/>
+          <a:p>
+            <a:pPr>
+              <a:spcAft>
+                <a:spcPts val="600"/>
+              </a:spcAft>
+            </a:pPr>
+            <a:r>
+              <a:rPr sz="1500">
+                <a:solidFill>
+                  <a:srgbClr val="22282E"/>
+                </a:solidFill>
+              </a:rPr>
               <a:t>•  NIST SP 800-218 SSDF — &lt;https://csrc.nist.gov/pubs/sp/800/218/final&gt;</a:t>
             </a:r>
           </a:p>
@@ -3629,6 +4140,81 @@
           </a:p>
         </p:txBody>
       </p:sp>
+    </p:spTree>
+  </p:cSld>
+  <p:clrMapOvr>
+    <a:masterClrMapping/>
+  </p:clrMapOvr>
+</p:sld>
+</file>
+
+<file path=ppt/slides/slide16.xml><?xml version="1.0" encoding="utf-8"?>
+<p:sld xmlns:a="http://schemas.openxmlformats.org/drawingml/2006/main" xmlns:p="http://schemas.openxmlformats.org/presentationml/2006/main" xmlns:r="http://schemas.openxmlformats.org/officeDocument/2006/relationships">
+  <p:cSld>
+    <p:spTree>
+      <p:nvGrpSpPr>
+        <p:cNvPr id="1" name=""/>
+        <p:cNvGrpSpPr/>
+        <p:nvPr/>
+      </p:nvGrpSpPr>
+      <p:grpSpPr/>
+      <p:sp>
+        <p:nvSpPr>
+          <p:cNvPr id="2" name="TextBox 1"/>
+          <p:cNvSpPr txBox="1"/>
+          <p:nvPr/>
+        </p:nvSpPr>
+        <p:spPr>
+          <a:xfrm>
+            <a:off x="457200" y="274320"/>
+            <a:ext cx="8229600" cy="640080"/>
+          </a:xfrm>
+          <a:prstGeom prst="rect">
+            <a:avLst/>
+          </a:prstGeom>
+          <a:noFill/>
+        </p:spPr>
+        <p:txBody>
+          <a:bodyPr wrap="square">
+            <a:spAutoFit/>
+          </a:bodyPr>
+          <a:lstStyle/>
+          <a:p>
+            <a:r>
+              <a:rPr sz="2200" b="1">
+                <a:solidFill>
+                  <a:srgbClr val="0B3D2E"/>
+                </a:solidFill>
+              </a:rPr>
+              <a:t>Diagrama de la clase</a:t>
+            </a:r>
+          </a:p>
+        </p:txBody>
+      </p:sp>
+      <p:pic>
+        <p:nvPicPr>
+          <p:cNvPr id="3" name="Picture 2" descr="cb9875d5d0f0cdfb.png"/>
+          <p:cNvPicPr>
+            <a:picLocks noChangeAspect="1"/>
+          </p:cNvPicPr>
+          <p:nvPr/>
+        </p:nvPicPr>
+        <p:blipFill>
+          <a:blip r:embed="rId2"/>
+          <a:stretch>
+            <a:fillRect/>
+          </a:stretch>
+        </p:blipFill>
+        <p:spPr>
+          <a:xfrm>
+            <a:off x="457200" y="3387852"/>
+            <a:ext cx="8229600" cy="722376"/>
+          </a:xfrm>
+          <a:prstGeom prst="rect">
+            <a:avLst/>
+          </a:prstGeom>
+        </p:spPr>
+      </p:pic>
     </p:spTree>
   </p:cSld>
   <p:clrMapOvr>
@@ -3862,7 +4448,7 @@
                   <a:srgbClr val="22282E"/>
                 </a:solidFill>
               </a:rPr>
-              <a:t>•  Explicar la diferencia entre seguridad "bolt-on" (al final) y "built-in" (integrada), con datos de coste de remediación.</a:t>
+              <a:t>•  Explicar la diferencia entre seguridad "bolt-on" (al final) y "built-in" (integrada), declarando los supuestos de cualquier estimación de remediación.</a:t>
             </a:r>
           </a:p>
           <a:p>
@@ -4152,7 +4738,7 @@
                   <a:srgbClr val="0B3D2E"/>
                 </a:solidFill>
               </a:rPr>
-              <a:t>📖 Definiciones y características</a:t>
+              <a:t>🧠 Explicación en profundidad</a:t>
             </a:r>
           </a:p>
         </p:txBody>
@@ -4190,82 +4776,82 @@
                   <a:srgbClr val="22282E"/>
                 </a:solidFill>
               </a:rPr>
-              <a:t>•  Secure SDLC: proceso de desarrollo donde las actividades de seguridad están integradas en cada fase, no añadidas al final. Característica: los controles son parte del "definition of done".</a:t>
-            </a:r>
-          </a:p>
-          <a:p>
-            <a:pPr>
-              <a:spcAft>
-                <a:spcPts val="600"/>
-              </a:spcAft>
-            </a:pPr>
-            <a:r>
-              <a:rPr sz="1500">
-                <a:solidFill>
-                  <a:srgbClr val="22282E"/>
-                </a:solidFill>
-              </a:rPr>
-              <a:t>•  Shift-left: mover las actividades de seguridad lo más temprano posible en el ciclo. Característica: cuanto antes se detecta un defecto, más barato es corregirlo.</a:t>
-            </a:r>
-          </a:p>
-          <a:p>
-            <a:pPr>
-              <a:spcAft>
-                <a:spcPts val="600"/>
-              </a:spcAft>
-            </a:pPr>
-            <a:r>
-              <a:rPr sz="1500">
-                <a:solidFill>
-                  <a:srgbClr val="22282E"/>
-                </a:solidFill>
-              </a:rPr>
-              <a:t>•  Shift-right: complementar con observabilidad y pruebas en producción (feature flags, canary, RASP). Característica: asume que no todo se puede prever antes del despliegue.</a:t>
-            </a:r>
-          </a:p>
-          <a:p>
-            <a:pPr>
-              <a:spcAft>
-                <a:spcPts val="600"/>
-              </a:spcAft>
-            </a:pPr>
-            <a:r>
-              <a:rPr sz="1500">
-                <a:solidFill>
-                  <a:srgbClr val="22282E"/>
-                </a:solidFill>
-              </a:rPr>
-              <a:t>•  Security gate: punto del pipeline donde una comprobación puede bloquear el avance. Característica: automático y objetivo, no una revisión manual subjetiva.</a:t>
-            </a:r>
-          </a:p>
-          <a:p>
-            <a:pPr>
-              <a:spcAft>
-                <a:spcPts val="600"/>
-              </a:spcAft>
-            </a:pPr>
-            <a:r>
-              <a:rPr sz="1500">
-                <a:solidFill>
-                  <a:srgbClr val="22282E"/>
-                </a:solidFill>
-              </a:rPr>
-              <a:t>•  OWASP SAMM: modelo de madurez con 5 funciones de negocio y prácticas medibles. Característica: prescriptivo y agnóstico de tecnología.</a:t>
-            </a:r>
-          </a:p>
-          <a:p>
-            <a:pPr>
-              <a:spcAft>
-                <a:spcPts val="600"/>
-              </a:spcAft>
-            </a:pPr>
-            <a:r>
-              <a:rPr sz="1500">
-                <a:solidFill>
-                  <a:srgbClr val="22282E"/>
-                </a:solidFill>
-              </a:rPr>
-              <a:t>•  BSIMM: modelo descriptivo basado en observar qué hacen organizaciones reales. Característica: benchmarking, no prescripción.</a:t>
+              <a:t>•  El ciclo de desarrollo seguro parte de una idea sencilla: una vulnerabilidad no aparece únicamente cuando una herramienta la detecta. Antes fue una decisión de requisitos, diseño, implementación…</a:t>
+            </a:r>
+          </a:p>
+          <a:p>
+            <a:pPr>
+              <a:spcAft>
+                <a:spcPts val="600"/>
+              </a:spcAft>
+            </a:pPr>
+            <a:r>
+              <a:rPr sz="1500">
+                <a:solidFill>
+                  <a:srgbClr val="22282E"/>
+                </a:solidFill>
+              </a:rPr>
+              <a:t>•  NIST SSDF no prescribe un pipeline único. Organiza prácticas de alto nivel en cuatro grupos: preparar a la organización, proteger el software, producir software bien asegurado y responder a…</a:t>
+            </a:r>
+          </a:p>
+          <a:p>
+            <a:pPr>
+              <a:spcAft>
+                <a:spcPts val="600"/>
+              </a:spcAft>
+            </a:pPr>
+            <a:r>
+              <a:rPr sz="1500">
+                <a:solidFill>
+                  <a:srgbClr val="22282E"/>
+                </a:solidFill>
+              </a:rPr>
+              <a:t>•  El diagrama es un ciclo, no una cinta que termina al desplegar. Shift-left acorta la distancia entre introducir y descubrir un defecto; shift-right devuelve evidencia de producción: comportamientos…</a:t>
+            </a:r>
+          </a:p>
+          <a:p>
+            <a:pPr>
+              <a:spcAft>
+                <a:spcPts val="600"/>
+              </a:spcAft>
+            </a:pPr>
+            <a:r>
+              <a:rPr sz="1500">
+                <a:solidFill>
+                  <a:srgbClr val="22282E"/>
+                </a:solidFill>
+              </a:rPr>
+              <a:t>•  Un gate es una decisión explícita: continuar, advertir o detener. Bloquear cada hallazgo desde el primer día suele producir evasión porque los analizadores emiten resultados con diferente confianza.…</a:t>
+            </a:r>
+          </a:p>
+          <a:p>
+            <a:pPr>
+              <a:spcAft>
+                <a:spcPts val="600"/>
+              </a:spcAft>
+            </a:pPr>
+            <a:r>
+              <a:rPr sz="1500">
+                <a:solidFill>
+                  <a:srgbClr val="22282E"/>
+                </a:solidFill>
+              </a:rPr>
+              <a:t>•  Tampoco debe repetirse como ley universal que corregir en producción cuesta exactamente 100 veces más. La dirección del efecto es razonable —un defecto tardío puede exigir migraciones, coordinación y…</a:t>
+            </a:r>
+          </a:p>
+          <a:p>
+            <a:pPr>
+              <a:spcAft>
+                <a:spcPts val="600"/>
+              </a:spcAft>
+            </a:pPr>
+            <a:r>
+              <a:rPr sz="1500">
+                <a:solidFill>
+                  <a:srgbClr val="22282E"/>
+                </a:solidFill>
+              </a:rPr>
+              <a:t>•  Un equipo termina una API y descubre en DAST que cualquier usuario puede consultar pedidos ajenos cambiando un identificador. El escáner encontró el síntoma, pero la causa nació antes: los requisitos…</a:t>
             </a:r>
           </a:p>
         </p:txBody>
@@ -4316,7 +4902,7 @@
                   <a:srgbClr val="0B3D2E"/>
                 </a:solidFill>
               </a:rPr>
-              <a:t>🧰 Herramientas y preparación</a:t>
+              <a:t>📔 Glosario operativo</a:t>
             </a:r>
           </a:p>
         </p:txBody>
@@ -4354,67 +4940,82 @@
                   <a:srgbClr val="22282E"/>
                 </a:solidFill>
               </a:rPr>
-              <a:t>•  Esta clase es conceptual/estratégica; el "laboratorio" es de diseño. Necesitarás:</a:t>
-            </a:r>
-          </a:p>
-          <a:p>
-            <a:pPr>
-              <a:spcAft>
-                <a:spcPts val="600"/>
-              </a:spcAft>
-            </a:pPr>
-            <a:r>
-              <a:rPr sz="1500">
-                <a:solidFill>
-                  <a:srgbClr val="22282E"/>
-                </a:solidFill>
-              </a:rPr>
-              <a:t>•  Una pizarra digital (Excalidraw, Miro) o papel para diagramar el SDLC.</a:t>
-            </a:r>
-          </a:p>
-          <a:p>
-            <a:pPr>
-              <a:spcAft>
-                <a:spcPts val="600"/>
-              </a:spcAft>
-            </a:pPr>
-            <a:r>
-              <a:rPr sz="1500">
-                <a:solidFill>
-                  <a:srgbClr val="22282E"/>
-                </a:solidFill>
-              </a:rPr>
-              <a:t>•  La hoja de auto-evaluación de OWASP SAMM v2 (descargable como toolbox en Excel desde owaspsamm.org).</a:t>
-            </a:r>
-          </a:p>
-          <a:p>
-            <a:pPr>
-              <a:spcAft>
-                <a:spcPts val="600"/>
-              </a:spcAft>
-            </a:pPr>
-            <a:r>
-              <a:rPr sz="1500">
-                <a:solidFill>
-                  <a:srgbClr val="22282E"/>
-                </a:solidFill>
-              </a:rPr>
-              <a:t>•  Acceso al documento NIST SP 800-218 para consultar las prácticas PO/PS/PW/RV.</a:t>
-            </a:r>
-          </a:p>
-          <a:p>
-            <a:pPr>
-              <a:spcAft>
-                <a:spcPts val="600"/>
-              </a:spcAft>
-            </a:pPr>
-            <a:r>
-              <a:rPr sz="1500">
-                <a:solidFill>
-                  <a:srgbClr val="22282E"/>
-                </a:solidFill>
-              </a:rPr>
-              <a:t>•  Un repositorio de ejemplo propio para ubicar dónde encajaría cada control.</a:t>
+              <a:t>•  Término — Significado en esta clase</a:t>
+            </a:r>
+          </a:p>
+          <a:p>
+            <a:pPr>
+              <a:spcAft>
+                <a:spcPts val="600"/>
+              </a:spcAft>
+            </a:pPr>
+            <a:r>
+              <a:rPr sz="1500">
+                <a:solidFill>
+                  <a:srgbClr val="22282E"/>
+                </a:solidFill>
+              </a:rPr>
+              <a:t>•  Propiedad de seguridad — Condición verificable que debe mantenerse, incluso ante entradas hostiles.</a:t>
+            </a:r>
+          </a:p>
+          <a:p>
+            <a:pPr>
+              <a:spcAft>
+                <a:spcPts val="600"/>
+              </a:spcAft>
+            </a:pPr>
+            <a:r>
+              <a:rPr sz="1500">
+                <a:solidFill>
+                  <a:srgbClr val="22282E"/>
+                </a:solidFill>
+              </a:rPr>
+              <a:t>•  Gate — Regla de decisión del flujo, con evidencia, umbral y tratamiento de excepciones.</a:t>
+            </a:r>
+          </a:p>
+          <a:p>
+            <a:pPr>
+              <a:spcAft>
+                <a:spcPts val="600"/>
+              </a:spcAft>
+            </a:pPr>
+            <a:r>
+              <a:rPr sz="1500">
+                <a:solidFill>
+                  <a:srgbClr val="22282E"/>
+                </a:solidFill>
+              </a:rPr>
+              <a:t>•  Línea base — Estado aceptado y documentado desde el que se impide introducir deuda nueva.</a:t>
+            </a:r>
+          </a:p>
+          <a:p>
+            <a:pPr>
+              <a:spcAft>
+                <a:spcPts val="600"/>
+              </a:spcAft>
+            </a:pPr>
+            <a:r>
+              <a:rPr sz="1500">
+                <a:solidFill>
+                  <a:srgbClr val="22282E"/>
+                </a:solidFill>
+              </a:rPr>
+              <a:t>•  Shift-left — Retroalimentar seguridad antes, sin prometer eliminar los fallos de producción.</a:t>
+            </a:r>
+          </a:p>
+          <a:p>
+            <a:pPr>
+              <a:spcAft>
+                <a:spcPts val="600"/>
+              </a:spcAft>
+            </a:pPr>
+            <a:r>
+              <a:rPr sz="1500">
+                <a:solidFill>
+                  <a:srgbClr val="22282E"/>
+                </a:solidFill>
+              </a:rPr>
+              <a:t>•  Shift-right — Validar hipótesis mediante observación y respuesta durante la operación.</a:t>
             </a:r>
           </a:p>
         </p:txBody>
@@ -4465,7 +5066,7 @@
                   <a:srgbClr val="0B3D2E"/>
                 </a:solidFill>
               </a:rPr>
-              <a:t>🧪 Laboratorio guiado</a:t>
+              <a:t>✅ Criterio de dominio</a:t>
             </a:r>
           </a:p>
         </p:txBody>
@@ -4503,97 +5104,7 @@
                   <a:srgbClr val="22282E"/>
                 </a:solidFill>
               </a:rPr>
-              <a:t>•  Ejercicio aplicado de diseño y evaluación (no ofensivo):</a:t>
-            </a:r>
-          </a:p>
-          <a:p>
-            <a:pPr>
-              <a:spcAft>
-                <a:spcPts val="600"/>
-              </a:spcAft>
-            </a:pPr>
-            <a:r>
-              <a:rPr sz="1500">
-                <a:solidFill>
-                  <a:srgbClr val="22282E"/>
-                </a:solidFill>
-              </a:rPr>
-              <a:t>•  Dibuja tu SDLC actual. Lista las fases reales por las que pasa un cambio en tu equipo: idea → requisitos → diseño → codificación → PR/review → build → test → despliegue → operación.</a:t>
-            </a:r>
-          </a:p>
-          <a:p>
-            <a:pPr>
-              <a:spcAft>
-                <a:spcPts val="600"/>
-              </a:spcAft>
-            </a:pPr>
-            <a:r>
-              <a:rPr sz="1500">
-                <a:solidFill>
-                  <a:srgbClr val="22282E"/>
-                </a:solidFill>
-              </a:rPr>
-              <a:t>•  Ubica los controles existentes. Marca en cada fase qué comprobación de seguridad ya existe hoy (aunque sea "ninguna"). Sé honesto.</a:t>
-            </a:r>
-          </a:p>
-          <a:p>
-            <a:pPr>
-              <a:spcAft>
-                <a:spcPts val="600"/>
-              </a:spcAft>
-            </a:pPr>
-            <a:r>
-              <a:rPr sz="1500">
-                <a:solidFill>
-                  <a:srgbClr val="22282E"/>
-                </a:solidFill>
-              </a:rPr>
-              <a:t>•  Identifica los huecos. Para cada fase sin control, anota una práctica candidata de esta parte (p. ej. threat modeling en diseño, SAST en PR, SCA en build).</a:t>
-            </a:r>
-          </a:p>
-          <a:p>
-            <a:pPr>
-              <a:spcAft>
-                <a:spcPts val="600"/>
-              </a:spcAft>
-            </a:pPr>
-            <a:r>
-              <a:rPr sz="1500">
-                <a:solidFill>
-                  <a:srgbClr val="22282E"/>
-                </a:solidFill>
-              </a:rPr>
-              <a:t>•  Descarga el toolbox de OWASP SAMM v2 y completa la auto-evaluación de al menos la práctica "Secure Build" y "Security Testing". Anota tu nivel actual (0–3).</a:t>
-            </a:r>
-          </a:p>
-          <a:p>
-            <a:pPr>
-              <a:spcAft>
-                <a:spcPts val="600"/>
-              </a:spcAft>
-            </a:pPr>
-            <a:r>
-              <a:rPr sz="1500">
-                <a:solidFill>
-                  <a:srgbClr val="22282E"/>
-                </a:solidFill>
-              </a:rPr>
-              <a:t>•  Estima el coste. Toma un bug de seguridad real que tu equipo haya arreglado en producción y estima qué habría costado detectarlo en la fase de código (revisa el modelo de IBM Systems Sciences Institute: ~1x en diseño, ~15x en test, ~100x en producción).</a:t>
-            </a:r>
-          </a:p>
-          <a:p>
-            <a:pPr>
-              <a:spcAft>
-                <a:spcPts val="600"/>
-              </a:spcAft>
-            </a:pPr>
-            <a:r>
-              <a:rPr sz="1500">
-                <a:solidFill>
-                  <a:srgbClr val="22282E"/>
-                </a:solidFill>
-              </a:rPr>
-              <a:t>•  Prioriza 3 gates. Elige los tres controles automatizados de mayor impacto/menor esfuerzo para introducir primero y justifícalos.</a:t>
+              <a:t>•  Hay dominio cuando el alumno puede tomar un cambio concreto, rastrear dónde puede introducir riesgo, asignar controles preventivos y detectivos por fase, justificar qué resultados bloquean la entrega…</a:t>
             </a:r>
           </a:p>
         </p:txBody>
@@ -4644,7 +5155,7 @@
                   <a:srgbClr val="0B3D2E"/>
                 </a:solidFill>
               </a:rPr>
-              <a:t>✍️ Ejercicios</a:t>
+              <a:t>📖 Definiciones y características</a:t>
             </a:r>
           </a:p>
         </p:txBody>
@@ -4682,82 +5193,82 @@
                   <a:srgbClr val="22282E"/>
                 </a:solidFill>
               </a:rPr>
-              <a:t>•  Enumera las fases del SDLC y asigna a cada una un control de seguridad concreto.</a:t>
-            </a:r>
-          </a:p>
-          <a:p>
-            <a:pPr>
-              <a:spcAft>
-                <a:spcPts val="600"/>
-              </a:spcAft>
-            </a:pPr>
-            <a:r>
-              <a:rPr sz="1500">
-                <a:solidFill>
-                  <a:srgbClr val="22282E"/>
-                </a:solidFill>
-              </a:rPr>
-              <a:t>•  Explica con un ejemplo por qué un fallo de diseño es más caro que un fallo de código.</a:t>
-            </a:r>
-          </a:p>
-          <a:p>
-            <a:pPr>
-              <a:spcAft>
-                <a:spcPts val="600"/>
-              </a:spcAft>
-            </a:pPr>
-            <a:r>
-              <a:rPr sz="1500">
-                <a:solidFill>
-                  <a:srgbClr val="22282E"/>
-                </a:solidFill>
-              </a:rPr>
-              <a:t>•  Diferencia shift-left de shift-right con un caso donde ambos son necesarios.</a:t>
-            </a:r>
-          </a:p>
-          <a:p>
-            <a:pPr>
-              <a:spcAft>
-                <a:spcPts val="600"/>
-              </a:spcAft>
-            </a:pPr>
-            <a:r>
-              <a:rPr sz="1500">
-                <a:solidFill>
-                  <a:srgbClr val="22282E"/>
-                </a:solidFill>
-              </a:rPr>
-              <a:t>•  Compara OWASP SAMM y BSIMM: cuándo usarías cada uno.</a:t>
-            </a:r>
-          </a:p>
-          <a:p>
-            <a:pPr>
-              <a:spcAft>
-                <a:spcPts val="600"/>
-              </a:spcAft>
-            </a:pPr>
-            <a:r>
-              <a:rPr sz="1500">
-                <a:solidFill>
-                  <a:srgbClr val="22282E"/>
-                </a:solidFill>
-              </a:rPr>
-              <a:t>•  Redacta un "definition of done" que incluya al menos tres criterios de seguridad.</a:t>
-            </a:r>
-          </a:p>
-          <a:p>
-            <a:pPr>
-              <a:spcAft>
-                <a:spcPts val="600"/>
-              </a:spcAft>
-            </a:pPr>
-            <a:r>
-              <a:rPr sz="1500">
-                <a:solidFill>
-                  <a:srgbClr val="22282E"/>
-                </a:solidFill>
-              </a:rPr>
-              <a:t>•  Diseña un roadmap de 90 días para llevar una práctica de SAMM de nivel 0 a nivel 1.</a:t>
+              <a:t>•  Secure SDLC: proceso de desarrollo donde las actividades de seguridad están integradas en cada fase, no añadidas al final. Característica: los controles son parte del "definition of done".</a:t>
+            </a:r>
+          </a:p>
+          <a:p>
+            <a:pPr>
+              <a:spcAft>
+                <a:spcPts val="600"/>
+              </a:spcAft>
+            </a:pPr>
+            <a:r>
+              <a:rPr sz="1500">
+                <a:solidFill>
+                  <a:srgbClr val="22282E"/>
+                </a:solidFill>
+              </a:rPr>
+              <a:t>•  Shift-left: mover las actividades de seguridad lo más temprano posible en el ciclo. Característica: cuanto antes se detecta un defecto, más barato es corregirlo.</a:t>
+            </a:r>
+          </a:p>
+          <a:p>
+            <a:pPr>
+              <a:spcAft>
+                <a:spcPts val="600"/>
+              </a:spcAft>
+            </a:pPr>
+            <a:r>
+              <a:rPr sz="1500">
+                <a:solidFill>
+                  <a:srgbClr val="22282E"/>
+                </a:solidFill>
+              </a:rPr>
+              <a:t>•  Shift-right: complementar con observabilidad y pruebas en producción (feature flags, canary, RASP). Característica: asume que no todo se puede prever antes del despliegue.</a:t>
+            </a:r>
+          </a:p>
+          <a:p>
+            <a:pPr>
+              <a:spcAft>
+                <a:spcPts val="600"/>
+              </a:spcAft>
+            </a:pPr>
+            <a:r>
+              <a:rPr sz="1500">
+                <a:solidFill>
+                  <a:srgbClr val="22282E"/>
+                </a:solidFill>
+              </a:rPr>
+              <a:t>•  Security gate: punto del pipeline donde una comprobación puede bloquear el avance. Característica: automático y objetivo, no una revisión manual subjetiva.</a:t>
+            </a:r>
+          </a:p>
+          <a:p>
+            <a:pPr>
+              <a:spcAft>
+                <a:spcPts val="600"/>
+              </a:spcAft>
+            </a:pPr>
+            <a:r>
+              <a:rPr sz="1500">
+                <a:solidFill>
+                  <a:srgbClr val="22282E"/>
+                </a:solidFill>
+              </a:rPr>
+              <a:t>•  OWASP SAMM: modelo de madurez con 5 funciones de negocio y prácticas medibles. Característica: prescriptivo y agnóstico de tecnología.</a:t>
+            </a:r>
+          </a:p>
+          <a:p>
+            <a:pPr>
+              <a:spcAft>
+                <a:spcPts val="600"/>
+              </a:spcAft>
+            </a:pPr>
+            <a:r>
+              <a:rPr sz="1500">
+                <a:solidFill>
+                  <a:srgbClr val="22282E"/>
+                </a:solidFill>
+              </a:rPr>
+              <a:t>•  BSIMM: modelo descriptivo basado en observar qué hacen organizaciones reales. Característica: benchmarking, no prescripción.</a:t>
             </a:r>
           </a:p>
         </p:txBody>
@@ -4808,7 +5319,7 @@
                   <a:srgbClr val="0B3D2E"/>
                 </a:solidFill>
               </a:rPr>
-              <a:t>📝 Reto verificable</a:t>
+              <a:t>🧰 Herramientas y preparación</a:t>
             </a:r>
           </a:p>
         </p:txBody>
@@ -4846,82 +5357,67 @@
                   <a:srgbClr val="22282E"/>
                 </a:solidFill>
               </a:rPr>
-              <a:t>•  Produce un documento de una página con el mapa del SDLC de un proyecto real (o de ejemplo),</a:t>
-            </a:r>
-          </a:p>
-          <a:p>
-            <a:pPr>
-              <a:spcAft>
-                <a:spcPts val="600"/>
-              </a:spcAft>
-            </a:pPr>
-            <a:r>
-              <a:rPr sz="1500">
-                <a:solidFill>
-                  <a:srgbClr val="22282E"/>
-                </a:solidFill>
-              </a:rPr>
-              <a:t>•  con al menos un control automatizado por fase y una auto-evaluación SAMM de tres prácticas.</a:t>
-            </a:r>
-          </a:p>
-          <a:p>
-            <a:pPr>
-              <a:spcAft>
-                <a:spcPts val="600"/>
-              </a:spcAft>
-            </a:pPr>
-            <a:r>
-              <a:rPr sz="1500">
-                <a:solidFill>
-                  <a:srgbClr val="22282E"/>
-                </a:solidFill>
-              </a:rPr>
-              <a:t>•  Criterio de aceptación: el documento (a) cubre todas las fases desde requisitos hasta</a:t>
-            </a:r>
-          </a:p>
-          <a:p>
-            <a:pPr>
-              <a:spcAft>
-                <a:spcPts val="600"/>
-              </a:spcAft>
-            </a:pPr>
-            <a:r>
-              <a:rPr sz="1500">
-                <a:solidFill>
-                  <a:srgbClr val="22282E"/>
-                </a:solidFill>
-              </a:rPr>
-              <a:t>•  operación, (b) asigna al menos un gate automatizable a cada fase, (c) incluye puntuación</a:t>
-            </a:r>
-          </a:p>
-          <a:p>
-            <a:pPr>
-              <a:spcAft>
-                <a:spcPts val="600"/>
-              </a:spcAft>
-            </a:pPr>
-            <a:r>
-              <a:rPr sz="1500">
-                <a:solidFill>
-                  <a:srgbClr val="22282E"/>
-                </a:solidFill>
-              </a:rPr>
-              <a:t>•  SAMM 0–3 de tres prácticas con justificación, y (d) prioriza 3 mejoras con criterio</a:t>
-            </a:r>
-          </a:p>
-          <a:p>
-            <a:pPr>
-              <a:spcAft>
-                <a:spcPts val="600"/>
-              </a:spcAft>
-            </a:pPr>
-            <a:r>
-              <a:rPr sz="1500">
-                <a:solidFill>
-                  <a:srgbClr val="22282E"/>
-                </a:solidFill>
-              </a:rPr>
-              <a:t>•  impacto/esfuerzo explícito.</a:t>
+              <a:t>•  Esta clase es conceptual/estratégica; el "laboratorio" es de diseño. Necesitarás:</a:t>
+            </a:r>
+          </a:p>
+          <a:p>
+            <a:pPr>
+              <a:spcAft>
+                <a:spcPts val="600"/>
+              </a:spcAft>
+            </a:pPr>
+            <a:r>
+              <a:rPr sz="1500">
+                <a:solidFill>
+                  <a:srgbClr val="22282E"/>
+                </a:solidFill>
+              </a:rPr>
+              <a:t>•  Una pizarra digital (Excalidraw, Miro) o papel para diagramar el SDLC.</a:t>
+            </a:r>
+          </a:p>
+          <a:p>
+            <a:pPr>
+              <a:spcAft>
+                <a:spcPts val="600"/>
+              </a:spcAft>
+            </a:pPr>
+            <a:r>
+              <a:rPr sz="1500">
+                <a:solidFill>
+                  <a:srgbClr val="22282E"/>
+                </a:solidFill>
+              </a:rPr>
+              <a:t>•  La hoja de auto-evaluación de OWASP SAMM v2 (descargable como toolbox en Excel desde owaspsamm.org).</a:t>
+            </a:r>
+          </a:p>
+          <a:p>
+            <a:pPr>
+              <a:spcAft>
+                <a:spcPts val="600"/>
+              </a:spcAft>
+            </a:pPr>
+            <a:r>
+              <a:rPr sz="1500">
+                <a:solidFill>
+                  <a:srgbClr val="22282E"/>
+                </a:solidFill>
+              </a:rPr>
+              <a:t>•  Acceso al documento NIST SP 800-218 para consultar las prácticas PO/PS/PW/RV.</a:t>
+            </a:r>
+          </a:p>
+          <a:p>
+            <a:pPr>
+              <a:spcAft>
+                <a:spcPts val="600"/>
+              </a:spcAft>
+            </a:pPr>
+            <a:r>
+              <a:rPr sz="1500">
+                <a:solidFill>
+                  <a:srgbClr val="22282E"/>
+                </a:solidFill>
+              </a:rPr>
+              <a:t>•  Un repositorio de ejemplo propio para ubicar dónde encajaría cada control.</a:t>
             </a:r>
           </a:p>
         </p:txBody>
